--- a/figures_tables/Supp_Figures.pptx
+++ b/figures_tables/Supp_Figures.pptx
@@ -5665,7 +5665,7 @@
             </a:r>
             <a:r>
               <a:rPr lang="en-CA" sz="1100" dirty="0"/>
-              <a:t>-VNN panel: number of mutation, copy-number-amplification (CNA), and copy-number-deletion (CND) events per model, UHN carboplatin vs. McGill cisplatin (left; two-sided Mann–Whitney U test; ****, p &lt; 0.0001; ns, not significant). Right, sensitivity check for the Mutation comparison: the same test repeated on only the 232 genes with recorded mutation data in both cohorts, alongside the original all-718-gene comparison (****, p = 3.8×10⁻¹¹; **, p = 4.2×10⁻³) — the cohort gene-coverage gap (Fig. 4c) inflates the difference but does not fully explain it. (b) For the McGill cisplatin (top) and UHN carboplatin (bottom) cohorts: distribution of raw, uncensored treatment-arm follow-up duration per batch (left); correlation between the uncensored treatment-arm slope and follow-up duration (two-sided Spearman r annotated; middle); and drift in median treatment-arm slope as a function of the candidate response-window cutoff, </a:t>
+              <a:t>-VNN panel: number of mutation, copy-number-amplification (CNA), and copy-number-deletion (CND) events per model, UHN carboplatin vs. McGill cisplatin (left; two-sided Mann–Whitney U test; ****, p &lt; 0.0001; ns, not significant). Right, sensitivity check for the Mutation comparison: the same test repeated on only the 232 genes with recorded mutation data in both cohorts, alongside the original all-718-gene comparison (****, p = 4.02×10⁻¹¹; **, p = 5.09×10⁻³) — the cohort gene-coverage gap (Fig. 4c) inflates the difference but does not fully explain it. (b) For the McGill cisplatin (top) and UHN carboplatin (bottom) cohorts: distribution of raw, uncensored treatment-arm follow-up duration per batch (left); correlation between the uncensored treatment-arm slope and follow-up duration (two-sided Spearman r annotated; middle); and drift in median treatment-arm slope as a function of the candidate response-window cutoff, </a:t>
             </a:r>
             <a:r>
               <a:rPr lang="en-CA" sz="1100" dirty="0" err="1"/>
